--- a/src/ppt-super/assets/tpl-18-core-stacked/template.pptx
+++ b/src/ppt-super/assets/tpl-18-core-stacked/template.pptx
@@ -3136,7 +3136,14 @@
           <a:bodyPr rtlCol="0" anchor="ctr"/>
           <a:lstStyle/>
           <a:p>
-            <a:pPr algn="ctr"/>
+            <a:pPr algn="ctr">
+              <a:spcBef>
+                <a:spcPts val="0"/>
+              </a:spcBef>
+              <a:spcAft>
+                <a:spcPts val="0"/>
+              </a:spcAft>
+            </a:pPr>
           </a:p>
         </p:txBody>
       </p:sp>
@@ -3166,14 +3173,21 @@
               <a:lnSpc>
                 <a:spcPct val="112000"/>
               </a:lnSpc>
+              <a:spcBef>
+                <a:spcPts val="0"/>
+              </a:spcBef>
+              <a:spcAft>
+                <a:spcPts val="0"/>
+              </a:spcAft>
             </a:pPr>
             <a:r>
-              <a:rPr sz="1400" b="1" i="0">
+              <a:rPr sz="1400" b="1" i="0" lang="zh-CN" altLang="zh-CN">
                 <a:solidFill>
                   <a:srgbClr val="FFFFFF"/>
                 </a:solidFill>
                 <a:latin typeface="Microsoft YaHei"/>
                 <a:ea typeface="Microsoft YaHei"/>
+                <a:cs typeface="Microsoft YaHei"/>
               </a:rPr>
               <a:t>昇腾架构</a:t>
             </a:r>
@@ -3206,14 +3220,21 @@
               <a:lnSpc>
                 <a:spcPct val="112000"/>
               </a:lnSpc>
+              <a:spcBef>
+                <a:spcPts val="0"/>
+              </a:spcBef>
+              <a:spcAft>
+                <a:spcPts val="0"/>
+              </a:spcAft>
             </a:pPr>
             <a:r>
-              <a:rPr sz="2200" b="1" i="0">
+              <a:rPr sz="2200" b="1" i="0" lang="zh-CN" altLang="zh-CN">
                 <a:solidFill>
                   <a:srgbClr val="B90A0A"/>
                 </a:solidFill>
                 <a:latin typeface="Microsoft YaHei"/>
                 <a:ea typeface="Microsoft YaHei"/>
+                <a:cs typeface="Microsoft YaHei"/>
               </a:rPr>
               <a:t>达芬奇核心为根基, CANN+昇思三层协同构筑 AI 算力竞争力</a:t>
             </a:r>
@@ -3302,7 +3323,14 @@
           <a:bodyPr rtlCol="0" anchor="ctr"/>
           <a:lstStyle/>
           <a:p>
-            <a:pPr algn="ctr"/>
+            <a:pPr algn="ctr">
+              <a:spcBef>
+                <a:spcPts val="0"/>
+              </a:spcBef>
+              <a:spcAft>
+                <a:spcPts val="0"/>
+              </a:spcAft>
+            </a:pPr>
           </a:p>
         </p:txBody>
       </p:sp>
@@ -3350,7 +3378,14 @@
           <a:bodyPr rtlCol="0" anchor="ctr"/>
           <a:lstStyle/>
           <a:p>
-            <a:pPr algn="ctr"/>
+            <a:pPr algn="ctr">
+              <a:spcBef>
+                <a:spcPts val="0"/>
+              </a:spcBef>
+              <a:spcAft>
+                <a:spcPts val="0"/>
+              </a:spcAft>
+            </a:pPr>
           </a:p>
         </p:txBody>
       </p:sp>
@@ -3394,7 +3429,14 @@
           <a:bodyPr rtlCol="0" anchor="ctr"/>
           <a:lstStyle/>
           <a:p>
-            <a:pPr algn="ctr"/>
+            <a:pPr algn="ctr">
+              <a:spcBef>
+                <a:spcPts val="0"/>
+              </a:spcBef>
+              <a:spcAft>
+                <a:spcPts val="0"/>
+              </a:spcAft>
+            </a:pPr>
           </a:p>
         </p:txBody>
       </p:sp>
@@ -3424,14 +3466,21 @@
               <a:lnSpc>
                 <a:spcPct val="112000"/>
               </a:lnSpc>
+              <a:spcBef>
+                <a:spcPts val="0"/>
+              </a:spcBef>
+              <a:spcAft>
+                <a:spcPts val="0"/>
+              </a:spcAft>
             </a:pPr>
             <a:r>
-              <a:rPr sz="1700" b="1" i="0">
+              <a:rPr sz="1700" b="1" i="0" lang="zh-CN" altLang="zh-CN">
                 <a:solidFill>
                   <a:srgbClr val="FFFFFF"/>
                 </a:solidFill>
                 <a:latin typeface="Microsoft YaHei"/>
                 <a:ea typeface="Microsoft YaHei"/>
+                <a:cs typeface="Microsoft YaHei"/>
               </a:rPr>
               <a:t>达芬奇核心</a:t>
             </a:r>
@@ -3464,14 +3513,21 @@
               <a:lnSpc>
                 <a:spcPct val="112000"/>
               </a:lnSpc>
+              <a:spcBef>
+                <a:spcPts val="0"/>
+              </a:spcBef>
+              <a:spcAft>
+                <a:spcPts val="0"/>
+              </a:spcAft>
             </a:pPr>
             <a:r>
-              <a:rPr sz="950" b="0" i="0">
+              <a:rPr sz="950" b="0" i="0" lang="zh-CN" altLang="zh-CN">
                 <a:solidFill>
                   <a:srgbClr val="FFFFFF"/>
                 </a:solidFill>
                 <a:latin typeface="Microsoft YaHei"/>
                 <a:ea typeface="Microsoft YaHei"/>
+                <a:cs typeface="Microsoft YaHei"/>
               </a:rPr>
               <a:t>全栈自研 · 端边云统一</a:t>
             </a:r>
@@ -3504,14 +3560,21 @@
               <a:lnSpc>
                 <a:spcPct val="112000"/>
               </a:lnSpc>
+              <a:spcBef>
+                <a:spcPts val="0"/>
+              </a:spcBef>
+              <a:spcAft>
+                <a:spcPts val="0"/>
+              </a:spcAft>
             </a:pPr>
             <a:r>
-              <a:rPr sz="1000" b="0" i="0">
+              <a:rPr sz="1000" b="0" i="0" lang="zh-CN" altLang="zh-CN">
                 <a:solidFill>
                   <a:srgbClr val="595959"/>
                 </a:solidFill>
                 <a:latin typeface="Microsoft YaHei"/>
                 <a:ea typeface="Microsoft YaHei"/>
+                <a:cs typeface="Microsoft YaHei"/>
               </a:rPr>
               <a:t>核心夯基 → 运行时提效 → 生态放大, 三层协同筑竞争力</a:t>
             </a:r>
@@ -3544,14 +3607,21 @@
               <a:lnSpc>
                 <a:spcPct val="112000"/>
               </a:lnSpc>
+              <a:spcBef>
+                <a:spcPts val="0"/>
+              </a:spcBef>
+              <a:spcAft>
+                <a:spcPts val="0"/>
+              </a:spcAft>
             </a:pPr>
             <a:r>
-              <a:rPr sz="1300" b="1" i="0">
+              <a:rPr sz="1300" b="1" i="0" lang="zh-CN" altLang="zh-CN">
                 <a:solidFill>
                   <a:srgbClr val="1F4E79"/>
                 </a:solidFill>
                 <a:latin typeface="Microsoft YaHei"/>
                 <a:ea typeface="Microsoft YaHei"/>
+                <a:cs typeface="Microsoft YaHei"/>
               </a:rPr>
               <a:t>CANN 异构计算</a:t>
             </a:r>
@@ -3634,7 +3704,14 @@
           <a:bodyPr rtlCol="0" anchor="ctr"/>
           <a:lstStyle/>
           <a:p>
-            <a:pPr algn="ctr"/>
+            <a:pPr algn="ctr">
+              <a:spcBef>
+                <a:spcPts val="0"/>
+              </a:spcBef>
+              <a:spcAft>
+                <a:spcPts val="0"/>
+              </a:spcAft>
+            </a:pPr>
           </a:p>
         </p:txBody>
       </p:sp>
@@ -3664,14 +3741,21 @@
               <a:lnSpc>
                 <a:spcPct val="112000"/>
               </a:lnSpc>
+              <a:spcBef>
+                <a:spcPts val="0"/>
+              </a:spcBef>
+              <a:spcAft>
+                <a:spcPts val="0"/>
+              </a:spcAft>
             </a:pPr>
             <a:r>
-              <a:rPr sz="1250" b="1" i="0">
+              <a:rPr sz="1250" b="1" i="0" lang="zh-CN" altLang="zh-CN">
                 <a:solidFill>
                   <a:srgbClr val="2E75B6"/>
                 </a:solidFill>
                 <a:latin typeface="Microsoft YaHei"/>
                 <a:ea typeface="Microsoft YaHei"/>
+                <a:cs typeface="Microsoft YaHei"/>
               </a:rPr>
               <a:t>昇思 MindSpore 生态</a:t>
             </a:r>
@@ -3754,7 +3838,14 @@
           <a:bodyPr rtlCol="0" anchor="ctr"/>
           <a:lstStyle/>
           <a:p>
-            <a:pPr algn="ctr"/>
+            <a:pPr algn="ctr">
+              <a:spcBef>
+                <a:spcPts val="0"/>
+              </a:spcBef>
+              <a:spcAft>
+                <a:spcPts val="0"/>
+              </a:spcAft>
+            </a:pPr>
           </a:p>
         </p:txBody>
       </p:sp>
@@ -3798,7 +3889,14 @@
           <a:bodyPr rtlCol="0" anchor="ctr"/>
           <a:lstStyle/>
           <a:p>
-            <a:pPr algn="ctr"/>
+            <a:pPr algn="ctr">
+              <a:spcBef>
+                <a:spcPts val="0"/>
+              </a:spcBef>
+              <a:spcAft>
+                <a:spcPts val="0"/>
+              </a:spcAft>
+            </a:pPr>
           </a:p>
         </p:txBody>
       </p:sp>
@@ -3828,14 +3926,21 @@
               <a:lnSpc>
                 <a:spcPct val="112000"/>
               </a:lnSpc>
+              <a:spcBef>
+                <a:spcPts val="0"/>
+              </a:spcBef>
+              <a:spcAft>
+                <a:spcPts val="0"/>
+              </a:spcAft>
             </a:pPr>
             <a:r>
-              <a:rPr sz="1250" b="1" i="0">
+              <a:rPr sz="1250" b="1" i="0" lang="zh-CN" altLang="zh-CN">
                 <a:solidFill>
                   <a:srgbClr val="262626"/>
                 </a:solidFill>
                 <a:latin typeface="Microsoft YaHei"/>
                 <a:ea typeface="Microsoft YaHei"/>
+                <a:cs typeface="Microsoft YaHei"/>
               </a:rPr>
               <a:t>算子覆盖 1400+</a:t>
             </a:r>
@@ -3882,7 +3987,14 @@
           <a:bodyPr rtlCol="0" anchor="ctr"/>
           <a:lstStyle/>
           <a:p>
-            <a:pPr algn="ctr"/>
+            <a:pPr algn="ctr">
+              <a:spcBef>
+                <a:spcPts val="0"/>
+              </a:spcBef>
+              <a:spcAft>
+                <a:spcPts val="0"/>
+              </a:spcAft>
+            </a:pPr>
           </a:p>
         </p:txBody>
       </p:sp>
@@ -3912,14 +4024,21 @@
               <a:lnSpc>
                 <a:spcPct val="112000"/>
               </a:lnSpc>
+              <a:spcBef>
+                <a:spcPts val="0"/>
+              </a:spcBef>
+              <a:spcAft>
+                <a:spcPts val="0"/>
+              </a:spcAft>
             </a:pPr>
             <a:r>
-              <a:rPr sz="1250" b="1" i="0">
+              <a:rPr sz="1250" b="1" i="0" lang="zh-CN" altLang="zh-CN">
                 <a:solidFill>
                   <a:srgbClr val="262626"/>
                 </a:solidFill>
                 <a:latin typeface="Microsoft YaHei"/>
                 <a:ea typeface="Microsoft YaHei"/>
+                <a:cs typeface="Microsoft YaHei"/>
               </a:rPr>
               <a:t>集群线性度 92%</a:t>
             </a:r>
@@ -4079,7 +4198,14 @@
           <a:bodyPr rtlCol="0" anchor="ctr"/>
           <a:lstStyle/>
           <a:p>
-            <a:pPr algn="ctr"/>
+            <a:pPr algn="ctr">
+              <a:spcBef>
+                <a:spcPts val="0"/>
+              </a:spcBef>
+              <a:spcAft>
+                <a:spcPts val="0"/>
+              </a:spcAft>
+            </a:pPr>
           </a:p>
         </p:txBody>
       </p:sp>
@@ -4123,7 +4249,14 @@
           <a:bodyPr rtlCol="0" anchor="ctr"/>
           <a:lstStyle/>
           <a:p>
-            <a:pPr algn="ctr"/>
+            <a:pPr algn="ctr">
+              <a:spcBef>
+                <a:spcPts val="0"/>
+              </a:spcBef>
+              <a:spcAft>
+                <a:spcPts val="0"/>
+              </a:spcAft>
+            </a:pPr>
           </a:p>
         </p:txBody>
       </p:sp>
@@ -4167,7 +4300,14 @@
           <a:bodyPr rtlCol="0" anchor="ctr"/>
           <a:lstStyle/>
           <a:p>
-            <a:pPr algn="ctr"/>
+            <a:pPr algn="ctr">
+              <a:spcBef>
+                <a:spcPts val="0"/>
+              </a:spcBef>
+              <a:spcAft>
+                <a:spcPts val="0"/>
+              </a:spcAft>
+            </a:pPr>
           </a:p>
         </p:txBody>
       </p:sp>
@@ -4197,14 +4337,21 @@
               <a:lnSpc>
                 <a:spcPct val="112000"/>
               </a:lnSpc>
+              <a:spcBef>
+                <a:spcPts val="0"/>
+              </a:spcBef>
+              <a:spcAft>
+                <a:spcPts val="0"/>
+              </a:spcAft>
             </a:pPr>
             <a:r>
-              <a:rPr sz="1500" b="1" i="0">
+              <a:rPr sz="1500" b="1" i="0" lang="zh-CN" altLang="zh-CN">
                 <a:solidFill>
                   <a:srgbClr val="262626"/>
                 </a:solidFill>
                 <a:latin typeface="Microsoft YaHei"/>
                 <a:ea typeface="Microsoft YaHei"/>
+                <a:cs typeface="Microsoft YaHei"/>
               </a:rPr>
               <a:t>达芬奇核心: 自研架构夯实算力根基</a:t>
             </a:r>
@@ -4237,14 +4384,21 @@
               <a:lnSpc>
                 <a:spcPct val="130000"/>
               </a:lnSpc>
+              <a:spcBef>
+                <a:spcPts val="0"/>
+              </a:spcBef>
+              <a:spcAft>
+                <a:spcPts val="0"/>
+              </a:spcAft>
             </a:pPr>
             <a:r>
-              <a:rPr sz="1200" b="0" i="0">
+              <a:rPr sz="1200" b="0" i="0" lang="zh-CN" altLang="zh-CN">
                 <a:solidFill>
                   <a:srgbClr val="262626"/>
                 </a:solidFill>
                 <a:latin typeface="Microsoft YaHei"/>
                 <a:ea typeface="Microsoft YaHei"/>
+                <a:cs typeface="Microsoft YaHei"/>
               </a:rPr>
               <a:t>达芬奇核心采用自研 3D Cube 矩阵计算引擎, 单时钟周期完成 4096 次 MAC 运算, 统一架构覆盖端边云, 一次开发即可全场景部署。自研指令集深度优化, 算力密度领先业界 1.6 倍; 片上高带宽互联使数据搬运开销降低 70%, 单芯片提供 320 TFLOPS FP16 算力, 能效比提升 2.5 倍。</a:t>
             </a:r>
@@ -4293,7 +4447,14 @@
           <a:bodyPr rtlCol="0" anchor="ctr"/>
           <a:lstStyle/>
           <a:p>
-            <a:pPr algn="ctr"/>
+            <a:pPr algn="ctr">
+              <a:spcBef>
+                <a:spcPts val="0"/>
+              </a:spcBef>
+              <a:spcAft>
+                <a:spcPts val="0"/>
+              </a:spcAft>
+            </a:pPr>
           </a:p>
         </p:txBody>
       </p:sp>
@@ -4339,7 +4500,14 @@
           <a:bodyPr rtlCol="0" anchor="ctr"/>
           <a:lstStyle/>
           <a:p>
-            <a:pPr algn="ctr"/>
+            <a:pPr algn="ctr">
+              <a:spcBef>
+                <a:spcPts val="0"/>
+              </a:spcBef>
+              <a:spcAft>
+                <a:spcPts val="0"/>
+              </a:spcAft>
+            </a:pPr>
           </a:p>
         </p:txBody>
       </p:sp>
@@ -4801,14 +4969,21 @@
               <a:lnSpc>
                 <a:spcPct val="112000"/>
               </a:lnSpc>
+              <a:spcBef>
+                <a:spcPts val="0"/>
+              </a:spcBef>
+              <a:spcAft>
+                <a:spcPts val="0"/>
+              </a:spcAft>
             </a:pPr>
             <a:r>
-              <a:rPr sz="950" b="0" i="0">
+              <a:rPr sz="950" b="0" i="0" lang="zh-CN" altLang="zh-CN">
                 <a:solidFill>
                   <a:srgbClr val="595959"/>
                 </a:solidFill>
                 <a:latin typeface="Microsoft YaHei"/>
                 <a:ea typeface="Microsoft YaHei"/>
+                <a:cs typeface="Microsoft YaHei"/>
               </a:rPr>
               <a:t>Da Vinci Core</a:t>
             </a:r>
@@ -4857,7 +5032,14 @@
           <a:bodyPr rtlCol="0" anchor="ctr"/>
           <a:lstStyle/>
           <a:p>
-            <a:pPr algn="ctr"/>
+            <a:pPr algn="ctr">
+              <a:spcBef>
+                <a:spcPts val="0"/>
+              </a:spcBef>
+              <a:spcAft>
+                <a:spcPts val="0"/>
+              </a:spcAft>
+            </a:pPr>
           </a:p>
         </p:txBody>
       </p:sp>
@@ -4901,7 +5083,14 @@
           <a:bodyPr rtlCol="0" anchor="ctr"/>
           <a:lstStyle/>
           <a:p>
-            <a:pPr algn="ctr"/>
+            <a:pPr algn="ctr">
+              <a:spcBef>
+                <a:spcPts val="0"/>
+              </a:spcBef>
+              <a:spcAft>
+                <a:spcPts val="0"/>
+              </a:spcAft>
+            </a:pPr>
           </a:p>
         </p:txBody>
       </p:sp>
@@ -4945,7 +5134,14 @@
           <a:bodyPr rtlCol="0" anchor="ctr"/>
           <a:lstStyle/>
           <a:p>
-            <a:pPr algn="ctr"/>
+            <a:pPr algn="ctr">
+              <a:spcBef>
+                <a:spcPts val="0"/>
+              </a:spcBef>
+              <a:spcAft>
+                <a:spcPts val="0"/>
+              </a:spcAft>
+            </a:pPr>
           </a:p>
         </p:txBody>
       </p:sp>
@@ -4975,14 +5171,21 @@
               <a:lnSpc>
                 <a:spcPct val="112000"/>
               </a:lnSpc>
+              <a:spcBef>
+                <a:spcPts val="0"/>
+              </a:spcBef>
+              <a:spcAft>
+                <a:spcPts val="0"/>
+              </a:spcAft>
             </a:pPr>
             <a:r>
-              <a:rPr sz="1500" b="1" i="0">
+              <a:rPr sz="1500" b="1" i="0" lang="zh-CN" altLang="zh-CN">
                 <a:solidFill>
                   <a:srgbClr val="262626"/>
                 </a:solidFill>
                 <a:latin typeface="Microsoft YaHei"/>
                 <a:ea typeface="Microsoft YaHei"/>
+                <a:cs typeface="Microsoft YaHei"/>
               </a:rPr>
               <a:t>CANN 异构计算: 释放硬件极致性能</a:t>
             </a:r>
@@ -5015,14 +5218,21 @@
               <a:lnSpc>
                 <a:spcPct val="130000"/>
               </a:lnSpc>
+              <a:spcBef>
+                <a:spcPts val="0"/>
+              </a:spcBef>
+              <a:spcAft>
+                <a:spcPts val="0"/>
+              </a:spcAft>
             </a:pPr>
             <a:r>
-              <a:rPr sz="1200" b="0" i="0">
+              <a:rPr sz="1200" b="0" i="0" lang="zh-CN" altLang="zh-CN">
                 <a:solidFill>
                   <a:srgbClr val="262626"/>
                 </a:solidFill>
                 <a:latin typeface="Microsoft YaHei"/>
                 <a:ea typeface="Microsoft YaHei"/>
+                <a:cs typeface="Microsoft YaHei"/>
               </a:rPr>
               <a:t>CANN 通过图编译自动算子融合, 典型模型推理时延下降 38%, 1400+ 高性能算子库对 PyTorch/MindSpore 即插即用。Ascend C 语言使自定义算子开发从 2 周缩短至 3 天; 整图下沉执行让千卡集群训练线性度提升至 92%, 全栈 profiling 工具链使性能调优周期缩短一半。</a:t>
             </a:r>
@@ -5037,8 +5247,8 @@
         </p:nvSpPr>
         <p:spPr>
           <a:xfrm>
-            <a:off x="10668000" y="3119004"/>
-            <a:ext cx="635000" cy="635000"/>
+            <a:off x="10568749" y="2983113"/>
+            <a:ext cx="833501" cy="906780"/>
           </a:xfrm>
           <a:prstGeom prst="rect">
             <a:avLst/>
@@ -5055,14 +5265,21 @@
               <a:lnSpc>
                 <a:spcPct val="112000"/>
               </a:lnSpc>
+              <a:spcBef>
+                <a:spcPts val="0"/>
+              </a:spcBef>
+              <a:spcAft>
+                <a:spcPts val="0"/>
+              </a:spcAft>
             </a:pPr>
             <a:r>
-              <a:rPr sz="5600" b="1" i="0">
+              <a:rPr sz="5600" b="1" i="0" lang="zh-CN" altLang="zh-CN">
                 <a:solidFill>
                   <a:srgbClr val="1F4E79"/>
                 </a:solidFill>
                 <a:latin typeface="Microsoft YaHei"/>
                 <a:ea typeface="Microsoft YaHei"/>
+                <a:cs typeface="Microsoft YaHei"/>
               </a:rPr>
               <a:t>⚙</a:t>
             </a:r>
@@ -5095,14 +5312,21 @@
               <a:lnSpc>
                 <a:spcPct val="112000"/>
               </a:lnSpc>
+              <a:spcBef>
+                <a:spcPts val="0"/>
+              </a:spcBef>
+              <a:spcAft>
+                <a:spcPts val="0"/>
+              </a:spcAft>
             </a:pPr>
             <a:r>
-              <a:rPr sz="950" b="0" i="0">
+              <a:rPr sz="950" b="0" i="0" lang="zh-CN" altLang="zh-CN">
                 <a:solidFill>
                   <a:srgbClr val="595959"/>
                 </a:solidFill>
                 <a:latin typeface="Microsoft YaHei"/>
                 <a:ea typeface="Microsoft YaHei"/>
+                <a:cs typeface="Microsoft YaHei"/>
               </a:rPr>
               <a:t>CANN Runtime</a:t>
             </a:r>
@@ -5151,7 +5375,14 @@
           <a:bodyPr rtlCol="0" anchor="ctr"/>
           <a:lstStyle/>
           <a:p>
-            <a:pPr algn="ctr"/>
+            <a:pPr algn="ctr">
+              <a:spcBef>
+                <a:spcPts val="0"/>
+              </a:spcBef>
+              <a:spcAft>
+                <a:spcPts val="0"/>
+              </a:spcAft>
+            </a:pPr>
           </a:p>
         </p:txBody>
       </p:sp>
@@ -5195,7 +5426,14 @@
           <a:bodyPr rtlCol="0" anchor="ctr"/>
           <a:lstStyle/>
           <a:p>
-            <a:pPr algn="ctr"/>
+            <a:pPr algn="ctr">
+              <a:spcBef>
+                <a:spcPts val="0"/>
+              </a:spcBef>
+              <a:spcAft>
+                <a:spcPts val="0"/>
+              </a:spcAft>
+            </a:pPr>
           </a:p>
         </p:txBody>
       </p:sp>
@@ -5239,7 +5477,14 @@
           <a:bodyPr rtlCol="0" anchor="ctr"/>
           <a:lstStyle/>
           <a:p>
-            <a:pPr algn="ctr"/>
+            <a:pPr algn="ctr">
+              <a:spcBef>
+                <a:spcPts val="0"/>
+              </a:spcBef>
+              <a:spcAft>
+                <a:spcPts val="0"/>
+              </a:spcAft>
+            </a:pPr>
           </a:p>
         </p:txBody>
       </p:sp>
@@ -5269,14 +5514,21 @@
               <a:lnSpc>
                 <a:spcPct val="112000"/>
               </a:lnSpc>
+              <a:spcBef>
+                <a:spcPts val="0"/>
+              </a:spcBef>
+              <a:spcAft>
+                <a:spcPts val="0"/>
+              </a:spcAft>
             </a:pPr>
             <a:r>
-              <a:rPr sz="1500" b="1" i="0">
+              <a:rPr sz="1500" b="1" i="0" lang="zh-CN" altLang="zh-CN">
                 <a:solidFill>
                   <a:srgbClr val="262626"/>
                 </a:solidFill>
                 <a:latin typeface="Microsoft YaHei"/>
                 <a:ea typeface="Microsoft YaHei"/>
+                <a:cs typeface="Microsoft YaHei"/>
               </a:rPr>
               <a:t>昇思生态: 开源开放加速行业落地</a:t>
             </a:r>
@@ -5309,14 +5561,21 @@
               <a:lnSpc>
                 <a:spcPct val="130000"/>
               </a:lnSpc>
+              <a:spcBef>
+                <a:spcPts val="0"/>
+              </a:spcBef>
+              <a:spcAft>
+                <a:spcPts val="0"/>
+              </a:spcAft>
             </a:pPr>
             <a:r>
-              <a:rPr sz="1200" b="0" i="0">
+              <a:rPr sz="1200" b="0" i="0" lang="zh-CN" altLang="zh-CN">
                 <a:solidFill>
                   <a:srgbClr val="262626"/>
                 </a:solidFill>
                 <a:latin typeface="Microsoft YaHei"/>
                 <a:ea typeface="Microsoft YaHei"/>
+                <a:cs typeface="Microsoft YaHei"/>
               </a:rPr>
               <a:t>昇思 MindSpore 社区开发者已达 380 万, 累计下载 1100 万次, 50 余个行业大模型基于昇腾完成原生训练。伙伴解决方案超过 2800 个, 覆盖金融、制造、能源等核心场景; 30 余所高校开设昇腾课程, 每年培养开发者 12 万人, 开源社区月均合入 PR 1900+ 并保持季度版本迭代。</a:t>
             </a:r>
@@ -5363,7 +5622,14 @@
           <a:bodyPr rtlCol="0" anchor="ctr"/>
           <a:lstStyle/>
           <a:p>
-            <a:pPr algn="ctr"/>
+            <a:pPr algn="ctr">
+              <a:spcBef>
+                <a:spcPts val="0"/>
+              </a:spcBef>
+              <a:spcAft>
+                <a:spcPts val="0"/>
+              </a:spcAft>
+            </a:pPr>
           </a:p>
         </p:txBody>
       </p:sp>
@@ -5407,7 +5673,14 @@
           <a:bodyPr rtlCol="0" anchor="ctr"/>
           <a:lstStyle/>
           <a:p>
-            <a:pPr algn="ctr"/>
+            <a:pPr algn="ctr">
+              <a:spcBef>
+                <a:spcPts val="0"/>
+              </a:spcBef>
+              <a:spcAft>
+                <a:spcPts val="0"/>
+              </a:spcAft>
+            </a:pPr>
           </a:p>
         </p:txBody>
       </p:sp>
@@ -5451,7 +5724,14 @@
           <a:bodyPr rtlCol="0" anchor="ctr"/>
           <a:lstStyle/>
           <a:p>
-            <a:pPr algn="ctr"/>
+            <a:pPr algn="ctr">
+              <a:spcBef>
+                <a:spcPts val="0"/>
+              </a:spcBef>
+              <a:spcAft>
+                <a:spcPts val="0"/>
+              </a:spcAft>
+            </a:pPr>
           </a:p>
         </p:txBody>
       </p:sp>
@@ -5589,14 +5869,21 @@
               <a:lnSpc>
                 <a:spcPct val="112000"/>
               </a:lnSpc>
+              <a:spcBef>
+                <a:spcPts val="0"/>
+              </a:spcBef>
+              <a:spcAft>
+                <a:spcPts val="0"/>
+              </a:spcAft>
             </a:pPr>
             <a:r>
-              <a:rPr sz="950" b="0" i="0">
+              <a:rPr sz="950" b="0" i="0" lang="zh-CN" altLang="zh-CN">
                 <a:solidFill>
                   <a:srgbClr val="595959"/>
                 </a:solidFill>
                 <a:latin typeface="Microsoft YaHei"/>
                 <a:ea typeface="Microsoft YaHei"/>
+                <a:cs typeface="Microsoft YaHei"/>
               </a:rPr>
               <a:t>Open Ecosystem</a:t>
             </a:r>
